--- a/clase_08_optimizacion_agentes/slides/slides_clase08_avanzado.pptx
+++ b/clase_08_optimizacion_agentes/slides/slides_clase08_avanzado.pptx
@@ -3253,7 +3253,7 @@
                 </a:solidFill>
                 <a:latin typeface="Segoe UI"/>
               </a:rPr>
-              <a:t>Docentes: Ariel Giamportone, Soraya Corvalán</a:t>
+              <a:t>Docentes: Damian Giacone, Ariel Giamportone</a:t>
             </a:r>
           </a:p>
         </p:txBody>

--- a/clase_08_optimizacion_agentes/slides/slides_clase08_avanzado.pptx
+++ b/clase_08_optimizacion_agentes/slides/slides_clase08_avanzado.pptx
@@ -3096,14 +3096,14 @@
       <p:grpSpPr/>
       <p:pic>
         <p:nvPicPr>
-          <p:cNvPr id="2" name="Picture 1" descr="cover_bg.png"/>
+          <p:cNvPr id="8" name="Picture 7" descr="cover_bg.png"/>
           <p:cNvPicPr>
             <a:picLocks noChangeAspect="1"/>
           </p:cNvPicPr>
           <p:nvPr/>
         </p:nvPicPr>
         <p:blipFill>
-          <a:blip r:embed="rId2"/>
+          <a:blip r:embed="rId3"/>
           <a:stretch>
             <a:fillRect/>
           </a:stretch>
